--- a/SaaS-to-Talend-Overview.pptx
+++ b/SaaS-to-Talend-Overview.pptx
@@ -16049,7 +16049,7 @@
                 <a:latin typeface="Inter"/>
               </a:rPr>
               <a:t>OpenAPI / Swagger / freeform docs.
-One tHTTPClient job per GET endpoint.</a:t>
+One HTTPClient (TaCoKit) job per GET endpoint.</a:t>
             </a:r>
           </a:p>
         </p:txBody>
@@ -18256,7 +18256,7 @@
                 </a:solidFill>
                 <a:latin typeface="Inter"/>
               </a:rPr>
-              <a:t>tHTTPClient → tExtractJSONFields →
+              <a:t>HTTPClient → tExtractJSONFields →
 tLogRow + tFileOutputJSON per endpoint.</a:t>
             </a:r>
           </a:p>
@@ -19647,7 +19647,7 @@
           <a:lstStyle/>
           <a:p>
             <a:r>
-              <a:t>Modern HTTPClient component (TaCoKit)</a:t>
+              <a:t>Built on Talend's HTTPClient (TaCoKit)</a:t>
             </a:r>
           </a:p>
         </p:txBody>
@@ -19668,7 +19668,7 @@
           <a:lstStyle/>
           <a:p>
             <a:r>
-              <a:t>We emit the same component Talend Studio 8.0.1 ships natively — not the deprecated tRESTClient</a:t>
+              <a:t>Schema decompiled from http-common-1.2603.1.jar — full canonical auth + pagination, not the deprecated tRESTClient</a:t>
             </a:r>
           </a:p>
         </p:txBody>
@@ -19869,7 +19869,7 @@
                 </a:solidFill>
                 <a:latin typeface="Inter"/>
               </a:rPr>
-              <a:t>tHTTPClient_1</a:t>
+              <a:t>HTTPClient_1</a:t>
             </a:r>
           </a:p>
         </p:txBody>
@@ -19904,7 +19904,7 @@
                 </a:solidFill>
                 <a:latin typeface="Inter"/>
               </a:rPr>
-              <a:t>HTTPClient v5</a:t>
+              <a:t>HTTPClient v5 (TaCoKit)</a:t>
             </a:r>
           </a:p>
         </p:txBody>
@@ -20593,7 +20593,7 @@
                 </a:solidFill>
                 <a:latin typeface="Inter"/>
               </a:rPr>
-              <a:t>•  configuration.dataset.datastore.authentication.type ∈ {None, Basic, APIKey, OAuth20}</a:t>
+              <a:t>•  authentication.type ∈ {NoAuth, Bearer, Basic, APIKey, OAuth20}</a:t>
             </a:r>
           </a:p>
           <a:p>
@@ -20609,7 +20609,7 @@
                 </a:solidFill>
                 <a:latin typeface="Inter"/>
               </a:rPr>
-              <a:t>•  configuration.dataset.methodType = GET</a:t>
+              <a:t>•     ↳ Bearer.bearerToken / APIKey.{destination,headerName,token}</a:t>
             </a:r>
           </a:p>
           <a:p>
@@ -20625,7 +20625,7 @@
                 </a:solidFill>
                 <a:latin typeface="Inter"/>
               </a:rPr>
-              <a:t>•  configuration.dataset.resource = "/path"</a:t>
+              <a:t>•     ↳ OAuth20.{flow,tokenEndpoint,clientId,clientSecret,…}</a:t>
             </a:r>
           </a:p>
           <a:p>
@@ -20641,7 +20641,7 @@
                 </a:solidFill>
                 <a:latin typeface="Inter"/>
               </a:rPr>
-              <a:t>•  configuration.dataset.format = RAW_TEXT</a:t>
+              <a:t>•  pagination.strategy ∈ {OFFSET_LIMIT, MARKER, NEXT_LINK}</a:t>
             </a:r>
           </a:p>
           <a:p>
@@ -20657,7 +20657,7 @@
                 </a:solidFill>
                 <a:latin typeface="Inter"/>
               </a:rPr>
-              <a:t>•  configuration.dataset.returnedContent = BODY_ONLY</a:t>
+              <a:t>•     ↳ page/cursor → MARKER · offset → OFFSET_LIMIT</a:t>
             </a:r>
           </a:p>
           <a:p>
@@ -20673,7 +20673,7 @@
                 </a:solidFill>
                 <a:latin typeface="Inter"/>
               </a:rPr>
-              <a:t>•  configuration.httpVersion = HTTP_1_1</a:t>
+              <a:t>•     ↳ link-header / odata / jsonpath → NEXT_LINK</a:t>
             </a:r>
           </a:p>
           <a:p>
@@ -20689,7 +20689,23 @@
                 </a:solidFill>
                 <a:latin typeface="Inter"/>
               </a:rPr>
-              <a:t>•  configuration.dieOnError = true</a:t>
+              <a:t>•  configuration.dataset.{methodType, resource, format, returnedContent}</a:t>
+            </a:r>
+          </a:p>
+          <a:p>
+            <a:pPr algn="l">
+              <a:spcAft>
+                <a:spcPts val="600"/>
+              </a:spcAft>
+            </a:pPr>
+            <a:r>
+              <a:rPr sz="1100">
+                <a:solidFill>
+                  <a:srgbClr val="1A1A1A"/>
+                </a:solidFill>
+                <a:latin typeface="Inter"/>
+              </a:rPr>
+              <a:t>•  configuration.{httpVersion=HTTP_1_1, dieOnError=true}</a:t>
             </a:r>
           </a:p>
           <a:p>
